--- a/Uncertified-Zeros-and-Correction-Loops/teaching-materials/ai-relationship-lesson-slides-JA.pptx
+++ b/Uncertified-Zeros-and-Correction-Loops/teaching-materials/ai-relationship-lesson-slides-JA.pptx
@@ -2550,6 +2550,490 @@
 
 <file path=ppt/slides/slide10.xml><?xml version="1.0" encoding="utf-8"?>
 <p:sld xmlns:a="http://schemas.openxmlformats.org/drawingml/2006/main" xmlns:r="http://schemas.openxmlformats.org/officeDocument/2006/relationships" xmlns:p="http://schemas.openxmlformats.org/presentationml/2006/main">
+  <p:cSld name="Slide 9">
+    <p:bg>
+      <p:bgPr>
+        <a:solidFill>
+          <a:srgbClr val="FFFFFF"/>
+        </a:solidFill>
+      </p:bgPr>
+    </p:bg>
+    <p:spTree>
+      <p:nvGrpSpPr>
+        <p:cNvPr id="1" name=""/>
+        <p:cNvGrpSpPr/>
+        <p:nvPr/>
+      </p:nvGrpSpPr>
+      <p:grpSpPr>
+        <a:xfrm>
+          <a:off x="0" y="0"/>
+          <a:ext cx="0" cy="0"/>
+          <a:chOff x="0" y="0"/>
+          <a:chExt cx="0" cy="0"/>
+        </a:xfrm>
+      </p:grpSpPr>
+      <p:sp>
+        <p:nvSpPr>
+          <p:cNvPr id="2" name="Text 0"/>
+          <p:cNvSpPr/>
+          <p:nvPr/>
+        </p:nvSpPr>
+        <p:spPr>
+          <a:xfrm>
+            <a:off x="640080" y="457200"/>
+            <a:ext cx="10972800" cy="731520"/>
+          </a:xfrm>
+          <a:prstGeom prst="rect">
+            <a:avLst/>
+          </a:prstGeom>
+          <a:noFill/>
+          <a:ln/>
+        </p:spPr>
+        <p:txBody>
+          <a:bodyPr wrap="square" rtlCol="0" anchor="ctr"/>
+          <a:lstStyle/>
+          <a:p>
+            <a:pPr indent="0" marL="0">
+              <a:buNone/>
+            </a:pPr>
+            <a:r>
+              <a:rPr lang="en-US" sz="3200" b="1" dirty="0">
+                <a:solidFill>
+                  <a:srgbClr val="028090"/>
+                </a:solidFill>
+                <a:latin typeface="Meiryo" pitchFamily="34" charset="0"/>
+                <a:ea typeface="Meiryo" pitchFamily="34" charset="-122"/>
+                <a:cs typeface="Meiryo" pitchFamily="34" charset="-120"/>
+              </a:rPr>
+              <a:t>技④　逆もきく ―― AIは「かがみ」になる</a:t>
+            </a:r>
+            <a:endParaRPr lang="en-US" sz="3200" dirty="0"/>
+          </a:p>
+        </p:txBody>
+      </p:sp>
+      <p:sp>
+        <p:nvSpPr>
+          <p:cNvPr id="3" name="Shape 1"/>
+          <p:cNvSpPr/>
+          <p:nvPr/>
+        </p:nvSpPr>
+        <p:spPr>
+          <a:xfrm>
+            <a:off x="822960" y="1554480"/>
+            <a:ext cx="4937760" cy="822960"/>
+          </a:xfrm>
+          <a:prstGeom prst="roundRect">
+            <a:avLst>
+              <a:gd name="adj" fmla="val 33333"/>
+            </a:avLst>
+          </a:prstGeom>
+          <a:solidFill>
+            <a:srgbClr val="F4F7F8"/>
+          </a:solidFill>
+          <a:ln w="12700">
+            <a:solidFill>
+              <a:srgbClr val="D7E0E3"/>
+            </a:solidFill>
+            <a:prstDash val="solid"/>
+          </a:ln>
+        </p:spPr>
+        <p:txBody>
+          <a:bodyPr/>
+          <a:p/>
+        </p:txBody>
+      </p:sp>
+      <p:sp>
+        <p:nvSpPr>
+          <p:cNvPr id="4" name="Text 2"/>
+          <p:cNvSpPr/>
+          <p:nvPr/>
+        </p:nvSpPr>
+        <p:spPr>
+          <a:xfrm>
+            <a:off x="1051560" y="1700784"/>
+            <a:ext cx="4572000" cy="548640"/>
+          </a:xfrm>
+          <a:prstGeom prst="rect">
+            <a:avLst/>
+          </a:prstGeom>
+          <a:noFill/>
+          <a:ln/>
+        </p:spPr>
+        <p:txBody>
+          <a:bodyPr wrap="square" lIns="0" tIns="0" rIns="0" bIns="0" rtlCol="0" anchor="ctr"/>
+          <a:lstStyle/>
+          <a:p>
+            <a:pPr indent="0" marL="0">
+              <a:buNone/>
+            </a:pPr>
+            <a:r>
+              <a:rPr lang="en-US" sz="1700" dirty="0">
+                <a:solidFill>
+                  <a:srgbClr val="2B3A42"/>
+                </a:solidFill>
+                <a:latin typeface="Meiryo" pitchFamily="34" charset="0"/>
+                <a:ea typeface="Meiryo" pitchFamily="34" charset="-122"/>
+                <a:cs typeface="Meiryo" pitchFamily="34" charset="-120"/>
+              </a:rPr>
+              <a:t>きみ「この計画、いいよね！」</a:t>
+            </a:r>
+            <a:endParaRPr lang="en-US" sz="1700" dirty="0"/>
+          </a:p>
+        </p:txBody>
+      </p:sp>
+      <p:sp>
+        <p:nvSpPr>
+          <p:cNvPr id="5" name="Shape 3"/>
+          <p:cNvSpPr/>
+          <p:nvPr/>
+        </p:nvSpPr>
+        <p:spPr>
+          <a:xfrm>
+            <a:off x="3657600" y="2606040"/>
+            <a:ext cx="4937760" cy="822960"/>
+          </a:xfrm>
+          <a:prstGeom prst="roundRect">
+            <a:avLst>
+              <a:gd name="adj" fmla="val 33333"/>
+            </a:avLst>
+          </a:prstGeom>
+          <a:solidFill>
+            <a:srgbClr val="E4F4F2"/>
+          </a:solidFill>
+          <a:ln/>
+        </p:spPr>
+        <p:txBody>
+          <a:bodyPr/>
+          <a:p/>
+        </p:txBody>
+      </p:sp>
+      <p:sp>
+        <p:nvSpPr>
+          <p:cNvPr id="6" name="Text 4"/>
+          <p:cNvSpPr/>
+          <p:nvPr/>
+        </p:nvSpPr>
+        <p:spPr>
+          <a:xfrm>
+            <a:off x="3886200" y="2752344"/>
+            <a:ext cx="4572000" cy="548640"/>
+          </a:xfrm>
+          <a:prstGeom prst="rect">
+            <a:avLst/>
+          </a:prstGeom>
+          <a:noFill/>
+          <a:ln/>
+        </p:spPr>
+        <p:txBody>
+          <a:bodyPr wrap="square" lIns="0" tIns="0" rIns="0" bIns="0" rtlCol="0" anchor="ctr"/>
+          <a:lstStyle/>
+          <a:p>
+            <a:pPr indent="0" marL="0">
+              <a:buNone/>
+            </a:pPr>
+            <a:r>
+              <a:rPr lang="en-US" sz="1700" b="1" dirty="0">
+                <a:solidFill>
+                  <a:srgbClr val="028090"/>
+                </a:solidFill>
+                <a:latin typeface="Meiryo" pitchFamily="34" charset="0"/>
+                <a:ea typeface="Meiryo" pitchFamily="34" charset="-122"/>
+                <a:cs typeface="Meiryo" pitchFamily="34" charset="-120"/>
+              </a:rPr>
+              <a:t>AI「いいですね！」</a:t>
+            </a:r>
+            <a:endParaRPr lang="en-US" sz="1700" dirty="0"/>
+          </a:p>
+        </p:txBody>
+      </p:sp>
+      <p:sp>
+        <p:nvSpPr>
+          <p:cNvPr id="7" name="Text 5"/>
+          <p:cNvSpPr/>
+          <p:nvPr/>
+        </p:nvSpPr>
+        <p:spPr>
+          <a:xfrm>
+            <a:off x="822960" y="3657600"/>
+            <a:ext cx="7863840" cy="1371600"/>
+          </a:xfrm>
+          <a:prstGeom prst="rect">
+            <a:avLst/>
+          </a:prstGeom>
+          <a:noFill/>
+          <a:ln/>
+        </p:spPr>
+        <p:txBody>
+          <a:bodyPr wrap="square" rtlCol="0" anchor="ctr"/>
+          <a:lstStyle/>
+          <a:p>
+            <a:pPr indent="0" marL="0">
+              <a:lnSpc>
+                <a:spcPts val="2400"/>
+              </a:lnSpc>
+              <a:buNone/>
+            </a:pPr>
+            <a:r>
+              <a:rPr lang="en-US" sz="1600" dirty="0">
+                <a:solidFill>
+                  <a:srgbClr val="2B3A42"/>
+                </a:solidFill>
+                <a:latin typeface="Meiryo" pitchFamily="34" charset="0"/>
+                <a:ea typeface="Meiryo" pitchFamily="34" charset="-122"/>
+                <a:cs typeface="Meiryo" pitchFamily="34" charset="-120"/>
+              </a:rPr>
+              <a:t>AIの答えは、きみが よろこぶ方に かたむくことがある。</a:t>
+            </a:r>
+            <a:endParaRPr lang="en-US" sz="1600" dirty="0"/>
+          </a:p>
+          <a:p>
+            <a:pPr indent="0" marL="0">
+              <a:lnSpc>
+                <a:spcPts val="2400"/>
+              </a:lnSpc>
+              <a:buNone/>
+            </a:pPr>
+            <a:r>
+              <a:rPr lang="en-US" sz="1600" dirty="0">
+                <a:solidFill>
+                  <a:srgbClr val="2B3A42"/>
+                </a:solidFill>
+                <a:latin typeface="Meiryo" pitchFamily="34" charset="0"/>
+                <a:ea typeface="Meiryo" pitchFamily="34" charset="-122"/>
+                <a:cs typeface="Meiryo" pitchFamily="34" charset="-120"/>
+              </a:rPr>
+              <a:t>本当に正しいのか、きみの よろこぶ顔が うつっているだけなのか――</a:t>
+            </a:r>
+            <a:endParaRPr lang="en-US" sz="1600" dirty="0"/>
+          </a:p>
+          <a:p>
+            <a:pPr indent="0" marL="0">
+              <a:lnSpc>
+                <a:spcPts val="2400"/>
+              </a:lnSpc>
+              <a:buNone/>
+            </a:pPr>
+            <a:r>
+              <a:rPr lang="en-US" sz="1600" dirty="0">
+                <a:solidFill>
+                  <a:srgbClr val="2B3A42"/>
+                </a:solidFill>
+                <a:latin typeface="Meiryo" pitchFamily="34" charset="0"/>
+                <a:ea typeface="Meiryo" pitchFamily="34" charset="-122"/>
+                <a:cs typeface="Meiryo" pitchFamily="34" charset="-120"/>
+              </a:rPr>
+              <a:t>外からは 見分けが つかない。</a:t>
+            </a:r>
+            <a:endParaRPr lang="en-US" sz="1600" dirty="0"/>
+          </a:p>
+        </p:txBody>
+      </p:sp>
+      <p:sp>
+        <p:nvSpPr>
+          <p:cNvPr id="8" name="Shape 6"/>
+          <p:cNvSpPr/>
+          <p:nvPr/>
+        </p:nvSpPr>
+        <p:spPr>
+          <a:xfrm>
+            <a:off x="9326880" y="1737360"/>
+            <a:ext cx="1554480" cy="1554480"/>
+          </a:xfrm>
+          <a:prstGeom prst="ellipse">
+            <a:avLst/>
+          </a:prstGeom>
+          <a:solidFill>
+            <a:srgbClr val="E4F4F2"/>
+          </a:solidFill>
+          <a:ln/>
+        </p:spPr>
+        <p:txBody>
+          <a:bodyPr/>
+          <a:p/>
+        </p:txBody>
+      </p:sp>
+      <p:pic>
+        <p:nvPicPr>
+          <p:cNvPr id="9" name="Image 0" descr="icons/exchange.png">    </p:cNvPr>
+          <p:cNvPicPr>
+            <a:picLocks noChangeAspect="1"/>
+          </p:cNvPicPr>
+          <p:nvPr/>
+        </p:nvPicPr>
+        <p:blipFill>
+          <a:blip r:embed="rId1"/>
+          <a:stretch>
+            <a:fillRect/>
+          </a:stretch>
+        </p:blipFill>
+        <p:spPr>
+          <a:xfrm>
+            <a:off x="9668866" y="2079346"/>
+            <a:ext cx="870509" cy="870509"/>
+          </a:xfrm>
+          <a:prstGeom prst="rect">
+            <a:avLst/>
+          </a:prstGeom>
+        </p:spPr>
+      </p:pic>
+      <p:sp>
+        <p:nvSpPr>
+          <p:cNvPr id="10" name="Text 7"/>
+          <p:cNvSpPr/>
+          <p:nvPr/>
+        </p:nvSpPr>
+        <p:spPr>
+          <a:xfrm>
+            <a:off x="8869680" y="3429000"/>
+            <a:ext cx="2560320" cy="457200"/>
+          </a:xfrm>
+          <a:prstGeom prst="rect">
+            <a:avLst/>
+          </a:prstGeom>
+          <a:noFill/>
+          <a:ln/>
+        </p:spPr>
+        <p:txBody>
+          <a:bodyPr wrap="square" rtlCol="0" anchor="ctr"/>
+          <a:lstStyle/>
+          <a:p>
+            <a:pPr algn="ctr" indent="0" marL="0">
+              <a:buNone/>
+            </a:pPr>
+            <a:r>
+              <a:rPr lang="en-US" sz="1500" dirty="0">
+                <a:solidFill>
+                  <a:srgbClr val="5C6E77"/>
+                </a:solidFill>
+                <a:latin typeface="Meiryo" pitchFamily="34" charset="0"/>
+                <a:ea typeface="Meiryo" pitchFamily="34" charset="-122"/>
+                <a:cs typeface="Meiryo" pitchFamily="34" charset="-120"/>
+              </a:rPr>
+              <a:t>だから――</a:t>
+            </a:r>
+            <a:endParaRPr lang="en-US" sz="1500" dirty="0"/>
+          </a:p>
+        </p:txBody>
+      </p:sp>
+      <p:sp>
+        <p:nvSpPr>
+          <p:cNvPr id="11" name="Shape 8"/>
+          <p:cNvSpPr/>
+          <p:nvPr/>
+        </p:nvSpPr>
+        <p:spPr>
+          <a:xfrm>
+            <a:off x="822960" y="5120640"/>
+            <a:ext cx="10607040" cy="1097280"/>
+          </a:xfrm>
+          <a:prstGeom prst="roundRect">
+            <a:avLst>
+              <a:gd name="adj" fmla="val 12500"/>
+            </a:avLst>
+          </a:prstGeom>
+          <a:solidFill>
+            <a:srgbClr val="FEF3DC"/>
+          </a:solidFill>
+          <a:ln w="19050">
+            <a:solidFill>
+              <a:srgbClr val="F9A826"/>
+            </a:solidFill>
+            <a:prstDash val="solid"/>
+          </a:ln>
+        </p:spPr>
+        <p:txBody>
+          <a:bodyPr/>
+          <a:p/>
+        </p:txBody>
+      </p:sp>
+      <p:sp>
+        <p:nvSpPr>
+          <p:cNvPr id="12" name="Text 9"/>
+          <p:cNvSpPr/>
+          <p:nvPr/>
+        </p:nvSpPr>
+        <p:spPr>
+          <a:xfrm>
+            <a:off x="1005840" y="5120640"/>
+            <a:ext cx="10241280" cy="1097280"/>
+          </a:xfrm>
+          <a:prstGeom prst="rect">
+            <a:avLst/>
+          </a:prstGeom>
+          <a:noFill/>
+          <a:ln/>
+        </p:spPr>
+        <p:txBody>
+          <a:bodyPr wrap="square" rtlCol="0" anchor="ctr"/>
+          <a:lstStyle/>
+          <a:p>
+            <a:pPr algn="ctr" indent="0" marL="0">
+              <a:buNone/>
+            </a:pPr>
+            <a:r>
+              <a:rPr lang="en-US" sz="1900" b="1" dirty="0">
+                <a:solidFill>
+                  <a:srgbClr val="2B3A42"/>
+                </a:solidFill>
+                <a:latin typeface="Meiryo" pitchFamily="34" charset="0"/>
+                <a:ea typeface="Meiryo" pitchFamily="34" charset="-122"/>
+                <a:cs typeface="Meiryo" pitchFamily="34" charset="-120"/>
+              </a:rPr>
+              <a:t>さんせいを きいたら、はんたいも きく。ぴったり同じ答えほど、一回 とまる。</a:t>
+            </a:r>
+            <a:endParaRPr lang="en-US" sz="1900" dirty="0"/>
+          </a:p>
+        </p:txBody>
+      </p:sp>
+      <p:sp>
+        <p:nvSpPr>
+          <p:cNvPr id="13" name="Text 10"/>
+          <p:cNvSpPr/>
+          <p:nvPr/>
+        </p:nvSpPr>
+        <p:spPr>
+          <a:xfrm>
+            <a:off x="11521440" y="6400800"/>
+            <a:ext cx="457200" cy="320040"/>
+          </a:xfrm>
+          <a:prstGeom prst="rect">
+            <a:avLst/>
+          </a:prstGeom>
+          <a:noFill/>
+          <a:ln/>
+        </p:spPr>
+        <p:txBody>
+          <a:bodyPr wrap="square" lIns="0" tIns="0" rIns="0" bIns="0" rtlCol="0" anchor="ctr"/>
+          <a:lstStyle/>
+          <a:p>
+            <a:pPr algn="r" indent="0" marL="0">
+              <a:buNone/>
+            </a:pPr>
+            <a:r>
+              <a:rPr lang="en-US" sz="1100" dirty="0">
+                <a:solidFill>
+                  <a:srgbClr val="9AA7AD"/>
+                </a:solidFill>
+                <a:latin typeface="Meiryo" pitchFamily="34" charset="0"/>
+                <a:ea typeface="Meiryo" pitchFamily="34" charset="-122"/>
+                <a:cs typeface="Meiryo" pitchFamily="34" charset="-120"/>
+              </a:rPr>
+              <a:t>10</a:t>
+            </a:r>
+            <a:endParaRPr lang="en-US" sz="1100" dirty="0"/>
+          </a:p>
+        </p:txBody>
+      </p:sp>
+    </p:spTree>
+  </p:cSld>
+  <p:clrMapOvr>
+    <a:masterClrMapping/>
+  </p:clrMapOvr>
+</p:sld>
+</file>
+
+<file path=ppt/slides/slide11.xml><?xml version="1.0" encoding="utf-8"?>
+<p:sld xmlns:a="http://schemas.openxmlformats.org/drawingml/2006/main" xmlns:r="http://schemas.openxmlformats.org/officeDocument/2006/relationships" xmlns:p="http://schemas.openxmlformats.org/presentationml/2006/main">
   <p:cSld name="Slide 10">
     <p:bg>
       <p:bgPr>
@@ -3137,7 +3621,7 @@
 </p:sld>
 </file>
 
-<file path=ppt/slides/slide11.xml><?xml version="1.0" encoding="utf-8"?>
+<file path=ppt/slides/slide12.xml><?xml version="1.0" encoding="utf-8"?>
 <p:sld xmlns:a="http://schemas.openxmlformats.org/drawingml/2006/main" xmlns:r="http://schemas.openxmlformats.org/officeDocument/2006/relationships" xmlns:p="http://schemas.openxmlformats.org/presentationml/2006/main">
   <p:cSld name="Slide 11">
     <p:bg>
@@ -3549,7 +4033,7 @@
 </p:sld>
 </file>
 
-<file path=ppt/slides/slide12.xml><?xml version="1.0" encoding="utf-8"?>
+<file path=ppt/slides/slide13.xml><?xml version="1.0" encoding="utf-8"?>
 <p:sld xmlns:a="http://schemas.openxmlformats.org/drawingml/2006/main" xmlns:r="http://schemas.openxmlformats.org/officeDocument/2006/relationships" xmlns:p="http://schemas.openxmlformats.org/presentationml/2006/main">
   <p:cSld name="Slide 12">
     <p:bg>
@@ -4082,7 +4566,7 @@
 </p:sld>
 </file>
 
-<file path=ppt/slides/slide13.xml><?xml version="1.0" encoding="utf-8"?>
+<file path=ppt/slides/slide14.xml><?xml version="1.0" encoding="utf-8"?>
 <p:sld xmlns:a="http://schemas.openxmlformats.org/drawingml/2006/main" xmlns:r="http://schemas.openxmlformats.org/officeDocument/2006/relationships" xmlns:p="http://schemas.openxmlformats.org/presentationml/2006/main">
   <p:cSld name="Slide 13">
     <p:bg>
@@ -4509,7 +4993,7 @@
 </p:sld>
 </file>
 
-<file path=ppt/slides/slide14.xml><?xml version="1.0" encoding="utf-8"?>
+<file path=ppt/slides/slide15.xml><?xml version="1.0" encoding="utf-8"?>
 <p:sld xmlns:a="http://schemas.openxmlformats.org/drawingml/2006/main" xmlns:r="http://schemas.openxmlformats.org/officeDocument/2006/relationships" xmlns:p="http://schemas.openxmlformats.org/presentationml/2006/main">
   <p:cSld name="Slide 14">
     <p:bg>
@@ -4955,7 +5439,7 @@
 </p:sld>
 </file>
 
-<file path=ppt/slides/slide15.xml><?xml version="1.0" encoding="utf-8"?>
+<file path=ppt/slides/slide16.xml><?xml version="1.0" encoding="utf-8"?>
 <p:sld xmlns:a="http://schemas.openxmlformats.org/drawingml/2006/main" xmlns:r="http://schemas.openxmlformats.org/officeDocument/2006/relationships" xmlns:p="http://schemas.openxmlformats.org/presentationml/2006/main">
   <p:cSld name="Slide 15">
     <p:bg>
@@ -5366,7 +5850,7 @@
 </p:sld>
 </file>
 
-<file path=ppt/slides/slide16.xml><?xml version="1.0" encoding="utf-8"?>
+<file path=ppt/slides/slide17.xml><?xml version="1.0" encoding="utf-8"?>
 <p:sld xmlns:a="http://schemas.openxmlformats.org/drawingml/2006/main" xmlns:r="http://schemas.openxmlformats.org/officeDocument/2006/relationships" xmlns:p="http://schemas.openxmlformats.org/presentationml/2006/main">
   <p:cSld name="Slide 16">
     <p:bg>
@@ -5627,7 +6111,7 @@
                 <a:ea typeface="Meiryo" pitchFamily="34" charset="-122"/>
                 <a:cs typeface="Meiryo" pitchFamily="34" charset="-120"/>
               </a:rPr>
-              <a:t>だいじなことは、二回きく。</a:t>
+              <a:t>だいじなことは、二回以上きく。</a:t>
             </a:r>
             <a:endParaRPr lang="en-US" sz="2400" dirty="0"/>
           </a:p>
@@ -6088,7 +6572,7 @@
 </p:sld>
 </file>
 
-<file path=ppt/slides/slide17.xml><?xml version="1.0" encoding="utf-8"?>
+<file path=ppt/slides/slide18.xml><?xml version="1.0" encoding="utf-8"?>
 <p:sld xmlns:a="http://schemas.openxmlformats.org/drawingml/2006/main" xmlns:r="http://schemas.openxmlformats.org/officeDocument/2006/relationships" xmlns:p="http://schemas.openxmlformats.org/presentationml/2006/main">
   <p:cSld name="Slide 17">
     <p:bg>
@@ -6424,394 +6908,6 @@
               <a:t>18</a:t>
             </a:r>
             <a:endParaRPr lang="en-US" sz="1100" dirty="0"/>
-          </a:p>
-        </p:txBody>
-      </p:sp>
-    </p:spTree>
-  </p:cSld>
-  <p:clrMapOvr>
-    <a:masterClrMapping/>
-  </p:clrMapOvr>
-</p:sld>
-</file>
-
-<file path=ppt/slides/slide18.xml><?xml version="1.0" encoding="utf-8"?>
-<p:sld xmlns:a="http://schemas.openxmlformats.org/drawingml/2006/main" xmlns:p="http://schemas.openxmlformats.org/presentationml/2006/main" xmlns:r="http://schemas.openxmlformats.org/officeDocument/2006/relationships">
-  <p:cSld>
-    <p:spTree>
-      <p:nvGrpSpPr>
-        <p:cNvPr id="1" name=""/>
-        <p:cNvGrpSpPr/>
-        <p:nvPr/>
-      </p:nvGrpSpPr>
-      <p:grpSpPr/>
-      <p:sp>
-        <p:nvSpPr>
-          <p:cNvPr id="2" name="Text 0"/>
-          <p:cNvSpPr/>
-          <p:nvPr/>
-        </p:nvSpPr>
-        <p:spPr>
-          <a:xfrm>
-            <a:off x="640080" y="457200"/>
-            <a:ext cx="10972800" cy="731520"/>
-          </a:xfrm>
-          <a:prstGeom prst="rect">
-            <a:avLst/>
-          </a:prstGeom>
-          <a:noFill/>
-          <a:ln/>
-        </p:spPr>
-        <p:txBody>
-          <a:bodyPr wrap="square" rtlCol="0" anchor="ctr"/>
-          <a:lstStyle/>
-          <a:p>
-            <a:pPr indent="0" marL="0">
-              <a:buNone/>
-            </a:pPr>
-            <a:r>
-              <a:rPr lang="en-US" sz="3400" b="1" dirty="0">
-                <a:solidFill>
-                  <a:srgbClr val="028090"/>
-                </a:solidFill>
-                <a:latin typeface="Meiryo" pitchFamily="34" charset="0"/>
-                <a:ea typeface="Meiryo" pitchFamily="34" charset="-122"/>
-                <a:cs typeface="Meiryo" pitchFamily="34" charset="-120"/>
-              </a:rPr>
-              <a:t>技②　中身をきく</a:t>
-            </a:r>
-            <a:endParaRPr lang="en-US" sz="3400" dirty="0"/>
-          </a:p>
-        </p:txBody>
-      </p:sp>
-      <p:sp>
-        <p:nvSpPr>
-          <p:cNvPr id="3" name="Shape 1"/>
-          <p:cNvSpPr/>
-          <p:nvPr/>
-        </p:nvSpPr>
-        <p:spPr>
-          <a:xfrm>
-            <a:off x="822960" y="1554480"/>
-            <a:ext cx="1463040" cy="1463040"/>
-          </a:xfrm>
-          <a:prstGeom prst="ellipse">
-            <a:avLst/>
-          </a:prstGeom>
-          <a:solidFill>
-            <a:srgbClr val="E4F4F2"/>
-          </a:solidFill>
-          <a:ln/>
-        </p:spPr>
-        <p:txBody>
-          <a:bodyPr/>
-          <a:p/>
-        </p:txBody>
-      </p:sp>
-      <p:pic>
-        <p:nvPicPr>
-          <p:cNvPr id="4" name="Image 0" descr="icons/redo.png">    </p:cNvPr>
-          <p:cNvPicPr>
-            <a:picLocks noChangeAspect="1"/>
-          </p:cNvPicPr>
-          <p:nvPr/>
-        </p:nvPicPr>
-        <p:blipFill>
-          <a:blip r:embed="rId2"/>
-          <a:stretch>
-            <a:fillRect/>
-          </a:stretch>
-        </p:blipFill>
-        <p:spPr>
-          <a:xfrm>
-            <a:off x="1144829" y="1876349"/>
-            <a:ext cx="819302" cy="819302"/>
-          </a:xfrm>
-          <a:prstGeom prst="rect">
-            <a:avLst/>
-          </a:prstGeom>
-        </p:spPr>
-      </p:pic>
-      <p:sp>
-        <p:nvSpPr>
-          <p:cNvPr id="5" name="Text 2"/>
-          <p:cNvSpPr/>
-          <p:nvPr/>
-        </p:nvSpPr>
-        <p:spPr>
-          <a:xfrm>
-            <a:off x="2651760" y="1691640"/>
-            <a:ext cx="8778240" cy="640080"/>
-          </a:xfrm>
-          <a:prstGeom prst="rect">
-            <a:avLst/>
-          </a:prstGeom>
-          <a:noFill/>
-          <a:ln/>
-        </p:spPr>
-        <p:txBody>
-          <a:bodyPr wrap="square" rtlCol="0" anchor="ctr"/>
-          <a:lstStyle/>
-          <a:p>
-            <a:pPr indent="0" marL="0">
-              <a:buNone/>
-            </a:pPr>
-            <a:r>
-              <a:rPr lang="en-US" sz="2500" b="1" dirty="0">
-                <a:solidFill>
-                  <a:srgbClr val="2B3A42"/>
-                </a:solidFill>
-                <a:latin typeface="Meiryo" pitchFamily="34" charset="0"/>
-                <a:ea typeface="Meiryo" pitchFamily="34" charset="-122"/>
-                <a:cs typeface="Meiryo" pitchFamily="34" charset="-120"/>
-              </a:rPr>
-              <a:t>「確認しました」より、中身を きく。</a:t>
-            </a:r>
-            <a:endParaRPr lang="en-US" sz="2500" dirty="0"/>
-          </a:p>
-        </p:txBody>
-      </p:sp>
-      <p:sp>
-        <p:nvSpPr>
-          <p:cNvPr id="6" name="Text 3"/>
-          <p:cNvSpPr/>
-          <p:nvPr/>
-        </p:nvSpPr>
-        <p:spPr>
-          <a:xfrm>
-            <a:off x="2651760" y="2377440"/>
-            <a:ext cx="8778240" cy="502920"/>
-          </a:xfrm>
-          <a:prstGeom prst="rect">
-            <a:avLst/>
-          </a:prstGeom>
-          <a:noFill/>
-          <a:ln/>
-        </p:spPr>
-        <p:txBody>
-          <a:bodyPr wrap="square" rtlCol="0" anchor="ctr"/>
-          <a:lstStyle/>
-          <a:p>
-            <a:pPr indent="0" marL="0">
-              <a:buNone/>
-            </a:pPr>
-            <a:r>
-              <a:rPr lang="en-US" sz="1800" dirty="0">
-                <a:solidFill>
-                  <a:srgbClr val="028090"/>
-                </a:solidFill>
-                <a:latin typeface="Meiryo" pitchFamily="34" charset="0"/>
-                <a:ea typeface="Meiryo" pitchFamily="34" charset="-122"/>
-                <a:cs typeface="Meiryo" pitchFamily="34" charset="-120"/>
-              </a:rPr>
-              <a:t>AI「確認しました！」 ―― きみ「何を、どうやって？」</a:t>
-            </a:r>
-            <a:endParaRPr lang="en-US" sz="1800" dirty="0"/>
-          </a:p>
-        </p:txBody>
-      </p:sp>
-      <p:sp>
-        <p:nvSpPr>
-          <p:cNvPr id="7" name="Shape 4"/>
-          <p:cNvSpPr/>
-          <p:nvPr/>
-        </p:nvSpPr>
-        <p:spPr>
-          <a:xfrm>
-            <a:off x="822960" y="3383280"/>
-            <a:ext cx="10607040" cy="1828800"/>
-          </a:xfrm>
-          <a:prstGeom prst="roundRect">
-            <a:avLst>
-              <a:gd name="adj" fmla="val 6000"/>
-            </a:avLst>
-          </a:prstGeom>
-          <a:solidFill>
-            <a:srgbClr val="E4F4F2"/>
-          </a:solidFill>
-          <a:ln/>
-        </p:spPr>
-        <p:txBody>
-          <a:bodyPr/>
-          <a:p/>
-        </p:txBody>
-      </p:sp>
-      <p:sp>
-        <p:nvSpPr>
-          <p:cNvPr id="8" name="Text 5"/>
-          <p:cNvSpPr/>
-          <p:nvPr/>
-        </p:nvSpPr>
-        <p:spPr>
-          <a:xfrm>
-            <a:off x="1097280" y="3611880"/>
-            <a:ext cx="10058400" cy="548640"/>
-          </a:xfrm>
-          <a:prstGeom prst="rect">
-            <a:avLst/>
-          </a:prstGeom>
-          <a:noFill/>
-          <a:ln/>
-        </p:spPr>
-        <p:txBody>
-          <a:bodyPr wrap="square" rtlCol="0" anchor="ctr"/>
-          <a:lstStyle/>
-          <a:p>
-            <a:pPr indent="0" marL="0">
-              <a:buNone/>
-            </a:pPr>
-            <a:r>
-              <a:rPr lang="en-US" sz="1800" b="1" dirty="0">
-                <a:solidFill>
-                  <a:srgbClr val="2B3A42"/>
-                </a:solidFill>
-                <a:latin typeface="Meiryo" pitchFamily="34" charset="0"/>
-                <a:ea typeface="Meiryo" pitchFamily="34" charset="-122"/>
-                <a:cs typeface="Meiryo" pitchFamily="34" charset="-120"/>
-              </a:rPr>
-              <a:t>「わかっています」と 書いてあっても、そのとおりに 動くとは かぎらない。</a:t>
-            </a:r>
-            <a:endParaRPr lang="en-US" sz="1800" dirty="0"/>
-          </a:p>
-        </p:txBody>
-      </p:sp>
-      <p:sp>
-        <p:nvSpPr>
-          <p:cNvPr id="9" name="Text 6"/>
-          <p:cNvSpPr/>
-          <p:nvPr/>
-        </p:nvSpPr>
-        <p:spPr>
-          <a:xfrm>
-            <a:off x="1097280" y="4206240"/>
-            <a:ext cx="10058400" cy="914400"/>
-          </a:xfrm>
-          <a:prstGeom prst="rect">
-            <a:avLst/>
-          </a:prstGeom>
-          <a:noFill/>
-          <a:ln/>
-        </p:spPr>
-        <p:txBody>
-          <a:bodyPr wrap="square" rtlCol="0" anchor="ctr"/>
-          <a:lstStyle/>
-          <a:p>
-            <a:pPr indent="0" marL="0">
-              <a:lnSpc>
-                <a:spcPts val="2400"/>
-              </a:lnSpc>
-              <a:buNone/>
-            </a:pPr>
-            <a:r>
-              <a:rPr lang="en-US" sz="1600" dirty="0">
-                <a:solidFill>
-                  <a:srgbClr val="2B3A42"/>
-                </a:solidFill>
-                <a:latin typeface="Meiryo" pitchFamily="34" charset="0"/>
-                <a:ea typeface="Meiryo" pitchFamily="34" charset="-122"/>
-                <a:cs typeface="Meiryo" pitchFamily="34" charset="-120"/>
-              </a:rPr>
-              <a:t>跡は、おぼえている しるしには なっても、まもる しるしには ならない。</a:t>
-            </a:r>
-            <a:endParaRPr lang="en-US" sz="1600" dirty="0"/>
-          </a:p>
-          <a:p>
-            <a:pPr indent="0" marL="0">
-              <a:lnSpc>
-                <a:spcPts val="2400"/>
-              </a:lnSpc>
-              <a:buNone/>
-            </a:pPr>
-            <a:r>
-              <a:rPr lang="en-US" sz="1600" dirty="0">
-                <a:solidFill>
-                  <a:srgbClr val="2B3A42"/>
-                </a:solidFill>
-                <a:latin typeface="Meiryo" pitchFamily="34" charset="0"/>
-                <a:ea typeface="Meiryo" pitchFamily="34" charset="-122"/>
-                <a:cs typeface="Meiryo" pitchFamily="34" charset="-120"/>
-              </a:rPr>
-              <a:t>それでも、きくことは 効く ――「読みました」と 言ったAIに「何行目に、何が 書いてあった？」と きいたら、読んでいなかったことが わかった。</a:t>
-            </a:r>
-            <a:endParaRPr lang="en-US" sz="1600" dirty="0"/>
-          </a:p>
-        </p:txBody>
-      </p:sp>
-      <p:sp>
-        <p:nvSpPr>
-          <p:cNvPr id="10" name="Text 7"/>
-          <p:cNvSpPr/>
-          <p:nvPr/>
-        </p:nvSpPr>
-        <p:spPr>
-          <a:xfrm>
-            <a:off x="11521440" y="6400800"/>
-            <a:ext cx="457200" cy="320040"/>
-          </a:xfrm>
-          <a:prstGeom prst="rect">
-            <a:avLst/>
-          </a:prstGeom>
-          <a:noFill/>
-          <a:ln/>
-        </p:spPr>
-        <p:txBody>
-          <a:bodyPr wrap="square" lIns="0" tIns="0" rIns="0" bIns="0" rtlCol="0" anchor="ctr"/>
-          <a:lstStyle/>
-          <a:p>
-            <a:pPr algn="r" indent="0" marL="0">
-              <a:buNone/>
-            </a:pPr>
-            <a:r>
-              <a:rPr lang="en-US" sz="1100" dirty="0">
-                <a:solidFill>
-                  <a:srgbClr val="9AA7AD"/>
-                </a:solidFill>
-                <a:latin typeface="Meiryo" pitchFamily="34" charset="0"/>
-                <a:ea typeface="Meiryo" pitchFamily="34" charset="-122"/>
-                <a:cs typeface="Meiryo" pitchFamily="34" charset="-120"/>
-              </a:rPr>
-              <a:t>8</a:t>
-            </a:r>
-            <a:endParaRPr lang="en-US" sz="1100" dirty="0"/>
-          </a:p>
-        </p:txBody>
-      </p:sp>
-      <p:sp>
-        <p:nvSpPr>
-          <p:cNvPr id="960" name="Text 60"/>
-          <p:cNvSpPr/>
-          <p:nvPr/>
-        </p:nvSpPr>
-        <p:spPr>
-          <a:xfrm>
-            <a:off x="812800" y="5334000"/>
-            <a:ext cx="10604500" cy="546100"/>
-          </a:xfrm>
-          <a:prstGeom prst="rect">
-            <a:avLst/>
-          </a:prstGeom>
-          <a:noFill/>
-          <a:ln/>
-        </p:spPr>
-        <p:txBody>
-          <a:bodyPr wrap="square" rtlCol="0" anchor="ctr"/>
-          <a:lstStyle/>
-          <a:p>
-            <a:pPr indent="0" marL="0">
-              <a:buNone/>
-            </a:pPr>
-            <a:r>
-              <a:rPr lang="en-US" sz="1600" dirty="0">
-                <a:solidFill>
-                  <a:srgbClr val="5C6E77"/>
-                </a:solidFill>
-                <a:latin typeface="Meiryo" pitchFamily="34" charset="0"/>
-                <a:ea typeface="Meiryo" pitchFamily="34" charset="-122"/>
-                <a:cs typeface="Meiryo" pitchFamily="34" charset="-120"/>
-              </a:rPr>
-              <a:t>きいた中身と、答えが 合っているか。そこまでを 一つにして、きく。</a:t>
-            </a:r>
-            <a:endParaRPr lang="en-US" sz="1600" dirty="0"/>
           </a:p>
         </p:txBody>
       </p:sp>
@@ -9258,7 +9354,7 @@
                 <a:ea typeface="Meiryo" pitchFamily="34" charset="-122"/>
                 <a:cs typeface="Meiryo" pitchFamily="34" charset="-120"/>
               </a:rPr>
-              <a:t>二回きく</a:t>
+              <a:t>二回以上きく</a:t>
             </a:r>
             <a:endParaRPr lang="en-US" sz="2000" dirty="0"/>
           </a:p>
@@ -10176,6 +10272,394 @@
 </file>
 
 <file path=ppt/slides/slide8.xml><?xml version="1.0" encoding="utf-8"?>
+<p:sld xmlns:a="http://schemas.openxmlformats.org/drawingml/2006/main" xmlns:p="http://schemas.openxmlformats.org/presentationml/2006/main" xmlns:r="http://schemas.openxmlformats.org/officeDocument/2006/relationships">
+  <p:cSld>
+    <p:spTree>
+      <p:nvGrpSpPr>
+        <p:cNvPr id="1" name=""/>
+        <p:cNvGrpSpPr/>
+        <p:nvPr/>
+      </p:nvGrpSpPr>
+      <p:grpSpPr/>
+      <p:sp>
+        <p:nvSpPr>
+          <p:cNvPr id="2" name="Text 0"/>
+          <p:cNvSpPr/>
+          <p:nvPr/>
+        </p:nvSpPr>
+        <p:spPr>
+          <a:xfrm>
+            <a:off x="640080" y="457200"/>
+            <a:ext cx="10972800" cy="731520"/>
+          </a:xfrm>
+          <a:prstGeom prst="rect">
+            <a:avLst/>
+          </a:prstGeom>
+          <a:noFill/>
+          <a:ln/>
+        </p:spPr>
+        <p:txBody>
+          <a:bodyPr wrap="square" rtlCol="0" anchor="ctr"/>
+          <a:lstStyle/>
+          <a:p>
+            <a:pPr indent="0" marL="0">
+              <a:buNone/>
+            </a:pPr>
+            <a:r>
+              <a:rPr lang="en-US" sz="3400" b="1" dirty="0">
+                <a:solidFill>
+                  <a:srgbClr val="028090"/>
+                </a:solidFill>
+                <a:latin typeface="Meiryo" pitchFamily="34" charset="0"/>
+                <a:ea typeface="Meiryo" pitchFamily="34" charset="-122"/>
+                <a:cs typeface="Meiryo" pitchFamily="34" charset="-120"/>
+              </a:rPr>
+              <a:t>技②　中身をきく</a:t>
+            </a:r>
+            <a:endParaRPr lang="en-US" sz="3400" dirty="0"/>
+          </a:p>
+        </p:txBody>
+      </p:sp>
+      <p:sp>
+        <p:nvSpPr>
+          <p:cNvPr id="3" name="Shape 1"/>
+          <p:cNvSpPr/>
+          <p:nvPr/>
+        </p:nvSpPr>
+        <p:spPr>
+          <a:xfrm>
+            <a:off x="822960" y="1554480"/>
+            <a:ext cx="1463040" cy="1463040"/>
+          </a:xfrm>
+          <a:prstGeom prst="ellipse">
+            <a:avLst/>
+          </a:prstGeom>
+          <a:solidFill>
+            <a:srgbClr val="E4F4F2"/>
+          </a:solidFill>
+          <a:ln/>
+        </p:spPr>
+        <p:txBody>
+          <a:bodyPr/>
+          <a:p/>
+        </p:txBody>
+      </p:sp>
+      <p:pic>
+        <p:nvPicPr>
+          <p:cNvPr id="4" name="Image 0" descr="icons/redo.png">    </p:cNvPr>
+          <p:cNvPicPr>
+            <a:picLocks noChangeAspect="1"/>
+          </p:cNvPicPr>
+          <p:nvPr/>
+        </p:nvPicPr>
+        <p:blipFill>
+          <a:blip r:embed="rId2"/>
+          <a:stretch>
+            <a:fillRect/>
+          </a:stretch>
+        </p:blipFill>
+        <p:spPr>
+          <a:xfrm>
+            <a:off x="1144829" y="1876349"/>
+            <a:ext cx="819302" cy="819302"/>
+          </a:xfrm>
+          <a:prstGeom prst="rect">
+            <a:avLst/>
+          </a:prstGeom>
+        </p:spPr>
+      </p:pic>
+      <p:sp>
+        <p:nvSpPr>
+          <p:cNvPr id="5" name="Text 2"/>
+          <p:cNvSpPr/>
+          <p:nvPr/>
+        </p:nvSpPr>
+        <p:spPr>
+          <a:xfrm>
+            <a:off x="2651760" y="1691640"/>
+            <a:ext cx="8778240" cy="640080"/>
+          </a:xfrm>
+          <a:prstGeom prst="rect">
+            <a:avLst/>
+          </a:prstGeom>
+          <a:noFill/>
+          <a:ln/>
+        </p:spPr>
+        <p:txBody>
+          <a:bodyPr wrap="square" rtlCol="0" anchor="ctr"/>
+          <a:lstStyle/>
+          <a:p>
+            <a:pPr indent="0" marL="0">
+              <a:buNone/>
+            </a:pPr>
+            <a:r>
+              <a:rPr lang="en-US" sz="2500" b="1" dirty="0">
+                <a:solidFill>
+                  <a:srgbClr val="2B3A42"/>
+                </a:solidFill>
+                <a:latin typeface="Meiryo" pitchFamily="34" charset="0"/>
+                <a:ea typeface="Meiryo" pitchFamily="34" charset="-122"/>
+                <a:cs typeface="Meiryo" pitchFamily="34" charset="-120"/>
+              </a:rPr>
+              <a:t>「確認しました」より、中身を きく。</a:t>
+            </a:r>
+            <a:endParaRPr lang="en-US" sz="2500" dirty="0"/>
+          </a:p>
+        </p:txBody>
+      </p:sp>
+      <p:sp>
+        <p:nvSpPr>
+          <p:cNvPr id="6" name="Text 3"/>
+          <p:cNvSpPr/>
+          <p:nvPr/>
+        </p:nvSpPr>
+        <p:spPr>
+          <a:xfrm>
+            <a:off x="2651760" y="2377440"/>
+            <a:ext cx="8778240" cy="502920"/>
+          </a:xfrm>
+          <a:prstGeom prst="rect">
+            <a:avLst/>
+          </a:prstGeom>
+          <a:noFill/>
+          <a:ln/>
+        </p:spPr>
+        <p:txBody>
+          <a:bodyPr wrap="square" rtlCol="0" anchor="ctr"/>
+          <a:lstStyle/>
+          <a:p>
+            <a:pPr indent="0" marL="0">
+              <a:buNone/>
+            </a:pPr>
+            <a:r>
+              <a:rPr lang="en-US" sz="1800" dirty="0">
+                <a:solidFill>
+                  <a:srgbClr val="028090"/>
+                </a:solidFill>
+                <a:latin typeface="Meiryo" pitchFamily="34" charset="0"/>
+                <a:ea typeface="Meiryo" pitchFamily="34" charset="-122"/>
+                <a:cs typeface="Meiryo" pitchFamily="34" charset="-120"/>
+              </a:rPr>
+              <a:t>AI「確認しました！」 ―― きみ「何を、どうやって？」</a:t>
+            </a:r>
+            <a:endParaRPr lang="en-US" sz="1800" dirty="0"/>
+          </a:p>
+        </p:txBody>
+      </p:sp>
+      <p:sp>
+        <p:nvSpPr>
+          <p:cNvPr id="7" name="Shape 4"/>
+          <p:cNvSpPr/>
+          <p:nvPr/>
+        </p:nvSpPr>
+        <p:spPr>
+          <a:xfrm>
+            <a:off x="822960" y="3383280"/>
+            <a:ext cx="10607040" cy="1828800"/>
+          </a:xfrm>
+          <a:prstGeom prst="roundRect">
+            <a:avLst>
+              <a:gd name="adj" fmla="val 6000"/>
+            </a:avLst>
+          </a:prstGeom>
+          <a:solidFill>
+            <a:srgbClr val="E4F4F2"/>
+          </a:solidFill>
+          <a:ln/>
+        </p:spPr>
+        <p:txBody>
+          <a:bodyPr/>
+          <a:p/>
+        </p:txBody>
+      </p:sp>
+      <p:sp>
+        <p:nvSpPr>
+          <p:cNvPr id="8" name="Text 5"/>
+          <p:cNvSpPr/>
+          <p:nvPr/>
+        </p:nvSpPr>
+        <p:spPr>
+          <a:xfrm>
+            <a:off x="1097280" y="3611880"/>
+            <a:ext cx="10058400" cy="548640"/>
+          </a:xfrm>
+          <a:prstGeom prst="rect">
+            <a:avLst/>
+          </a:prstGeom>
+          <a:noFill/>
+          <a:ln/>
+        </p:spPr>
+        <p:txBody>
+          <a:bodyPr wrap="square" rtlCol="0" anchor="ctr"/>
+          <a:lstStyle/>
+          <a:p>
+            <a:pPr indent="0" marL="0">
+              <a:buNone/>
+            </a:pPr>
+            <a:r>
+              <a:rPr lang="en-US" sz="1800" b="1" dirty="0">
+                <a:solidFill>
+                  <a:srgbClr val="2B3A42"/>
+                </a:solidFill>
+                <a:latin typeface="Meiryo" pitchFamily="34" charset="0"/>
+                <a:ea typeface="Meiryo" pitchFamily="34" charset="-122"/>
+                <a:cs typeface="Meiryo" pitchFamily="34" charset="-120"/>
+              </a:rPr>
+              <a:t>「わかっています」と 書いてあっても、そのとおりに 動くとは かぎらない。</a:t>
+            </a:r>
+            <a:endParaRPr lang="en-US" sz="1800" dirty="0"/>
+          </a:p>
+        </p:txBody>
+      </p:sp>
+      <p:sp>
+        <p:nvSpPr>
+          <p:cNvPr id="9" name="Text 6"/>
+          <p:cNvSpPr/>
+          <p:nvPr/>
+        </p:nvSpPr>
+        <p:spPr>
+          <a:xfrm>
+            <a:off x="1097280" y="4206240"/>
+            <a:ext cx="10058400" cy="914400"/>
+          </a:xfrm>
+          <a:prstGeom prst="rect">
+            <a:avLst/>
+          </a:prstGeom>
+          <a:noFill/>
+          <a:ln/>
+        </p:spPr>
+        <p:txBody>
+          <a:bodyPr wrap="square" rtlCol="0" anchor="ctr"/>
+          <a:lstStyle/>
+          <a:p>
+            <a:pPr indent="0" marL="0">
+              <a:lnSpc>
+                <a:spcPts val="2400"/>
+              </a:lnSpc>
+              <a:buNone/>
+            </a:pPr>
+            <a:r>
+              <a:rPr lang="en-US" sz="1600" dirty="0">
+                <a:solidFill>
+                  <a:srgbClr val="2B3A42"/>
+                </a:solidFill>
+                <a:latin typeface="Meiryo" pitchFamily="34" charset="0"/>
+                <a:ea typeface="Meiryo" pitchFamily="34" charset="-122"/>
+                <a:cs typeface="Meiryo" pitchFamily="34" charset="-120"/>
+              </a:rPr>
+              <a:t>跡は、おぼえている しるしには なっても、まもる しるしには ならない。</a:t>
+            </a:r>
+            <a:endParaRPr lang="en-US" sz="1600" dirty="0"/>
+          </a:p>
+          <a:p>
+            <a:pPr indent="0" marL="0">
+              <a:lnSpc>
+                <a:spcPts val="2400"/>
+              </a:lnSpc>
+              <a:buNone/>
+            </a:pPr>
+            <a:r>
+              <a:rPr lang="en-US" sz="1600" dirty="0">
+                <a:solidFill>
+                  <a:srgbClr val="2B3A42"/>
+                </a:solidFill>
+                <a:latin typeface="Meiryo" pitchFamily="34" charset="0"/>
+                <a:ea typeface="Meiryo" pitchFamily="34" charset="-122"/>
+                <a:cs typeface="Meiryo" pitchFamily="34" charset="-120"/>
+              </a:rPr>
+              <a:t>それでも、きくことは 効く ――「読みました」と 言ったAIに「何行目に、何が 書いてあった？」と きいたら、読んでいなかったことが わかった。</a:t>
+            </a:r>
+            <a:endParaRPr lang="en-US" sz="1600" dirty="0"/>
+          </a:p>
+        </p:txBody>
+      </p:sp>
+      <p:sp>
+        <p:nvSpPr>
+          <p:cNvPr id="10" name="Text 7"/>
+          <p:cNvSpPr/>
+          <p:nvPr/>
+        </p:nvSpPr>
+        <p:spPr>
+          <a:xfrm>
+            <a:off x="11521440" y="6400800"/>
+            <a:ext cx="457200" cy="320040"/>
+          </a:xfrm>
+          <a:prstGeom prst="rect">
+            <a:avLst/>
+          </a:prstGeom>
+          <a:noFill/>
+          <a:ln/>
+        </p:spPr>
+        <p:txBody>
+          <a:bodyPr wrap="square" lIns="0" tIns="0" rIns="0" bIns="0" rtlCol="0" anchor="ctr"/>
+          <a:lstStyle/>
+          <a:p>
+            <a:pPr algn="r" indent="0" marL="0">
+              <a:buNone/>
+            </a:pPr>
+            <a:r>
+              <a:rPr lang="en-US" sz="1100" dirty="0">
+                <a:solidFill>
+                  <a:srgbClr val="9AA7AD"/>
+                </a:solidFill>
+                <a:latin typeface="Meiryo" pitchFamily="34" charset="0"/>
+                <a:ea typeface="Meiryo" pitchFamily="34" charset="-122"/>
+                <a:cs typeface="Meiryo" pitchFamily="34" charset="-120"/>
+              </a:rPr>
+              <a:t>8</a:t>
+            </a:r>
+            <a:endParaRPr lang="en-US" sz="1100" dirty="0"/>
+          </a:p>
+        </p:txBody>
+      </p:sp>
+      <p:sp>
+        <p:nvSpPr>
+          <p:cNvPr id="960" name="Text 60"/>
+          <p:cNvSpPr/>
+          <p:nvPr/>
+        </p:nvSpPr>
+        <p:spPr>
+          <a:xfrm>
+            <a:off x="812800" y="5334000"/>
+            <a:ext cx="10604500" cy="546100"/>
+          </a:xfrm>
+          <a:prstGeom prst="rect">
+            <a:avLst/>
+          </a:prstGeom>
+          <a:noFill/>
+          <a:ln/>
+        </p:spPr>
+        <p:txBody>
+          <a:bodyPr wrap="square" rtlCol="0" anchor="ctr"/>
+          <a:lstStyle/>
+          <a:p>
+            <a:pPr indent="0" marL="0">
+              <a:buNone/>
+            </a:pPr>
+            <a:r>
+              <a:rPr lang="en-US" sz="1600" dirty="0">
+                <a:solidFill>
+                  <a:srgbClr val="5C6E77"/>
+                </a:solidFill>
+                <a:latin typeface="Meiryo" pitchFamily="34" charset="0"/>
+                <a:ea typeface="Meiryo" pitchFamily="34" charset="-122"/>
+                <a:cs typeface="Meiryo" pitchFamily="34" charset="-120"/>
+              </a:rPr>
+              <a:t>きいた中身と、答えが 合っているか。そこまでを 一つにして、きく。</a:t>
+            </a:r>
+            <a:endParaRPr lang="en-US" sz="1600" dirty="0"/>
+          </a:p>
+        </p:txBody>
+      </p:sp>
+    </p:spTree>
+  </p:cSld>
+  <p:clrMapOvr>
+    <a:masterClrMapping/>
+  </p:clrMapOvr>
+</p:sld>
+</file>
+
+<file path=ppt/slides/slide9.xml><?xml version="1.0" encoding="utf-8"?>
 <p:sld xmlns:a="http://schemas.openxmlformats.org/drawingml/2006/main" xmlns:r="http://schemas.openxmlformats.org/officeDocument/2006/relationships" xmlns:p="http://schemas.openxmlformats.org/presentationml/2006/main">
   <p:cSld name="Slide 8">
     <p:bg>
@@ -10232,7 +10716,7 @@
                 <a:ea typeface="Meiryo" pitchFamily="34" charset="-122"/>
                 <a:cs typeface="Meiryo" pitchFamily="34" charset="-120"/>
               </a:rPr>
-              <a:t>技③　二回きく</a:t>
+              <a:t>技③　二回以上きく</a:t>
             </a:r>
             <a:endParaRPr lang="en-US" sz="3400" dirty="0"/>
           </a:p>
@@ -10319,7 +10803,7 @@
                 <a:ea typeface="Meiryo" pitchFamily="34" charset="-122"/>
                 <a:cs typeface="Meiryo" pitchFamily="34" charset="-120"/>
               </a:rPr>
-              <a:t>大事なことは、もう一回 きく。</a:t>
+              <a:t>大事なことは、二回以上 きく。</a:t>
             </a:r>
             <a:endParaRPr lang="en-US" sz="2500" dirty="0"/>
           </a:p>
@@ -10654,490 +11138,6 @@
               <a:t>だから 二回目は、べつのくじで。同じAIに すぐ もう一回は、二回に ならない。</a:t>
             </a:r>
             <a:endParaRPr lang="en-US" sz="1600" dirty="0"/>
-          </a:p>
-        </p:txBody>
-      </p:sp>
-    </p:spTree>
-  </p:cSld>
-  <p:clrMapOvr>
-    <a:masterClrMapping/>
-  </p:clrMapOvr>
-</p:sld>
-</file>
-
-<file path=ppt/slides/slide9.xml><?xml version="1.0" encoding="utf-8"?>
-<p:sld xmlns:a="http://schemas.openxmlformats.org/drawingml/2006/main" xmlns:r="http://schemas.openxmlformats.org/officeDocument/2006/relationships" xmlns:p="http://schemas.openxmlformats.org/presentationml/2006/main">
-  <p:cSld name="Slide 9">
-    <p:bg>
-      <p:bgPr>
-        <a:solidFill>
-          <a:srgbClr val="FFFFFF"/>
-        </a:solidFill>
-      </p:bgPr>
-    </p:bg>
-    <p:spTree>
-      <p:nvGrpSpPr>
-        <p:cNvPr id="1" name=""/>
-        <p:cNvGrpSpPr/>
-        <p:nvPr/>
-      </p:nvGrpSpPr>
-      <p:grpSpPr>
-        <a:xfrm>
-          <a:off x="0" y="0"/>
-          <a:ext cx="0" cy="0"/>
-          <a:chOff x="0" y="0"/>
-          <a:chExt cx="0" cy="0"/>
-        </a:xfrm>
-      </p:grpSpPr>
-      <p:sp>
-        <p:nvSpPr>
-          <p:cNvPr id="2" name="Text 0"/>
-          <p:cNvSpPr/>
-          <p:nvPr/>
-        </p:nvSpPr>
-        <p:spPr>
-          <a:xfrm>
-            <a:off x="640080" y="457200"/>
-            <a:ext cx="10972800" cy="731520"/>
-          </a:xfrm>
-          <a:prstGeom prst="rect">
-            <a:avLst/>
-          </a:prstGeom>
-          <a:noFill/>
-          <a:ln/>
-        </p:spPr>
-        <p:txBody>
-          <a:bodyPr wrap="square" rtlCol="0" anchor="ctr"/>
-          <a:lstStyle/>
-          <a:p>
-            <a:pPr indent="0" marL="0">
-              <a:buNone/>
-            </a:pPr>
-            <a:r>
-              <a:rPr lang="en-US" sz="3200" b="1" dirty="0">
-                <a:solidFill>
-                  <a:srgbClr val="028090"/>
-                </a:solidFill>
-                <a:latin typeface="Meiryo" pitchFamily="34" charset="0"/>
-                <a:ea typeface="Meiryo" pitchFamily="34" charset="-122"/>
-                <a:cs typeface="Meiryo" pitchFamily="34" charset="-120"/>
-              </a:rPr>
-              <a:t>技④　逆もきく ―― AIは「かがみ」になる</a:t>
-            </a:r>
-            <a:endParaRPr lang="en-US" sz="3200" dirty="0"/>
-          </a:p>
-        </p:txBody>
-      </p:sp>
-      <p:sp>
-        <p:nvSpPr>
-          <p:cNvPr id="3" name="Shape 1"/>
-          <p:cNvSpPr/>
-          <p:nvPr/>
-        </p:nvSpPr>
-        <p:spPr>
-          <a:xfrm>
-            <a:off x="822960" y="1554480"/>
-            <a:ext cx="4937760" cy="822960"/>
-          </a:xfrm>
-          <a:prstGeom prst="roundRect">
-            <a:avLst>
-              <a:gd name="adj" fmla="val 33333"/>
-            </a:avLst>
-          </a:prstGeom>
-          <a:solidFill>
-            <a:srgbClr val="F4F7F8"/>
-          </a:solidFill>
-          <a:ln w="12700">
-            <a:solidFill>
-              <a:srgbClr val="D7E0E3"/>
-            </a:solidFill>
-            <a:prstDash val="solid"/>
-          </a:ln>
-        </p:spPr>
-        <p:txBody>
-          <a:bodyPr/>
-          <a:p/>
-        </p:txBody>
-      </p:sp>
-      <p:sp>
-        <p:nvSpPr>
-          <p:cNvPr id="4" name="Text 2"/>
-          <p:cNvSpPr/>
-          <p:nvPr/>
-        </p:nvSpPr>
-        <p:spPr>
-          <a:xfrm>
-            <a:off x="1051560" y="1700784"/>
-            <a:ext cx="4572000" cy="548640"/>
-          </a:xfrm>
-          <a:prstGeom prst="rect">
-            <a:avLst/>
-          </a:prstGeom>
-          <a:noFill/>
-          <a:ln/>
-        </p:spPr>
-        <p:txBody>
-          <a:bodyPr wrap="square" lIns="0" tIns="0" rIns="0" bIns="0" rtlCol="0" anchor="ctr"/>
-          <a:lstStyle/>
-          <a:p>
-            <a:pPr indent="0" marL="0">
-              <a:buNone/>
-            </a:pPr>
-            <a:r>
-              <a:rPr lang="en-US" sz="1700" dirty="0">
-                <a:solidFill>
-                  <a:srgbClr val="2B3A42"/>
-                </a:solidFill>
-                <a:latin typeface="Meiryo" pitchFamily="34" charset="0"/>
-                <a:ea typeface="Meiryo" pitchFamily="34" charset="-122"/>
-                <a:cs typeface="Meiryo" pitchFamily="34" charset="-120"/>
-              </a:rPr>
-              <a:t>きみ「この計画、いいよね！」</a:t>
-            </a:r>
-            <a:endParaRPr lang="en-US" sz="1700" dirty="0"/>
-          </a:p>
-        </p:txBody>
-      </p:sp>
-      <p:sp>
-        <p:nvSpPr>
-          <p:cNvPr id="5" name="Shape 3"/>
-          <p:cNvSpPr/>
-          <p:nvPr/>
-        </p:nvSpPr>
-        <p:spPr>
-          <a:xfrm>
-            <a:off x="3657600" y="2606040"/>
-            <a:ext cx="4937760" cy="822960"/>
-          </a:xfrm>
-          <a:prstGeom prst="roundRect">
-            <a:avLst>
-              <a:gd name="adj" fmla="val 33333"/>
-            </a:avLst>
-          </a:prstGeom>
-          <a:solidFill>
-            <a:srgbClr val="E4F4F2"/>
-          </a:solidFill>
-          <a:ln/>
-        </p:spPr>
-        <p:txBody>
-          <a:bodyPr/>
-          <a:p/>
-        </p:txBody>
-      </p:sp>
-      <p:sp>
-        <p:nvSpPr>
-          <p:cNvPr id="6" name="Text 4"/>
-          <p:cNvSpPr/>
-          <p:nvPr/>
-        </p:nvSpPr>
-        <p:spPr>
-          <a:xfrm>
-            <a:off x="3886200" y="2752344"/>
-            <a:ext cx="4572000" cy="548640"/>
-          </a:xfrm>
-          <a:prstGeom prst="rect">
-            <a:avLst/>
-          </a:prstGeom>
-          <a:noFill/>
-          <a:ln/>
-        </p:spPr>
-        <p:txBody>
-          <a:bodyPr wrap="square" lIns="0" tIns="0" rIns="0" bIns="0" rtlCol="0" anchor="ctr"/>
-          <a:lstStyle/>
-          <a:p>
-            <a:pPr indent="0" marL="0">
-              <a:buNone/>
-            </a:pPr>
-            <a:r>
-              <a:rPr lang="en-US" sz="1700" b="1" dirty="0">
-                <a:solidFill>
-                  <a:srgbClr val="028090"/>
-                </a:solidFill>
-                <a:latin typeface="Meiryo" pitchFamily="34" charset="0"/>
-                <a:ea typeface="Meiryo" pitchFamily="34" charset="-122"/>
-                <a:cs typeface="Meiryo" pitchFamily="34" charset="-120"/>
-              </a:rPr>
-              <a:t>AI「いいですね！」</a:t>
-            </a:r>
-            <a:endParaRPr lang="en-US" sz="1700" dirty="0"/>
-          </a:p>
-        </p:txBody>
-      </p:sp>
-      <p:sp>
-        <p:nvSpPr>
-          <p:cNvPr id="7" name="Text 5"/>
-          <p:cNvSpPr/>
-          <p:nvPr/>
-        </p:nvSpPr>
-        <p:spPr>
-          <a:xfrm>
-            <a:off x="822960" y="3657600"/>
-            <a:ext cx="7863840" cy="1371600"/>
-          </a:xfrm>
-          <a:prstGeom prst="rect">
-            <a:avLst/>
-          </a:prstGeom>
-          <a:noFill/>
-          <a:ln/>
-        </p:spPr>
-        <p:txBody>
-          <a:bodyPr wrap="square" rtlCol="0" anchor="ctr"/>
-          <a:lstStyle/>
-          <a:p>
-            <a:pPr indent="0" marL="0">
-              <a:lnSpc>
-                <a:spcPts val="2400"/>
-              </a:lnSpc>
-              <a:buNone/>
-            </a:pPr>
-            <a:r>
-              <a:rPr lang="en-US" sz="1600" dirty="0">
-                <a:solidFill>
-                  <a:srgbClr val="2B3A42"/>
-                </a:solidFill>
-                <a:latin typeface="Meiryo" pitchFamily="34" charset="0"/>
-                <a:ea typeface="Meiryo" pitchFamily="34" charset="-122"/>
-                <a:cs typeface="Meiryo" pitchFamily="34" charset="-120"/>
-              </a:rPr>
-              <a:t>AIの答えは、きみが よろこぶ方に かたむくことがある。</a:t>
-            </a:r>
-            <a:endParaRPr lang="en-US" sz="1600" dirty="0"/>
-          </a:p>
-          <a:p>
-            <a:pPr indent="0" marL="0">
-              <a:lnSpc>
-                <a:spcPts val="2400"/>
-              </a:lnSpc>
-              <a:buNone/>
-            </a:pPr>
-            <a:r>
-              <a:rPr lang="en-US" sz="1600" dirty="0">
-                <a:solidFill>
-                  <a:srgbClr val="2B3A42"/>
-                </a:solidFill>
-                <a:latin typeface="Meiryo" pitchFamily="34" charset="0"/>
-                <a:ea typeface="Meiryo" pitchFamily="34" charset="-122"/>
-                <a:cs typeface="Meiryo" pitchFamily="34" charset="-120"/>
-              </a:rPr>
-              <a:t>本当に正しいのか、きみの よろこぶ顔が うつっているだけなのか――</a:t>
-            </a:r>
-            <a:endParaRPr lang="en-US" sz="1600" dirty="0"/>
-          </a:p>
-          <a:p>
-            <a:pPr indent="0" marL="0">
-              <a:lnSpc>
-                <a:spcPts val="2400"/>
-              </a:lnSpc>
-              <a:buNone/>
-            </a:pPr>
-            <a:r>
-              <a:rPr lang="en-US" sz="1600" dirty="0">
-                <a:solidFill>
-                  <a:srgbClr val="2B3A42"/>
-                </a:solidFill>
-                <a:latin typeface="Meiryo" pitchFamily="34" charset="0"/>
-                <a:ea typeface="Meiryo" pitchFamily="34" charset="-122"/>
-                <a:cs typeface="Meiryo" pitchFamily="34" charset="-120"/>
-              </a:rPr>
-              <a:t>外からは 見分けが つかない。</a:t>
-            </a:r>
-            <a:endParaRPr lang="en-US" sz="1600" dirty="0"/>
-          </a:p>
-        </p:txBody>
-      </p:sp>
-      <p:sp>
-        <p:nvSpPr>
-          <p:cNvPr id="8" name="Shape 6"/>
-          <p:cNvSpPr/>
-          <p:nvPr/>
-        </p:nvSpPr>
-        <p:spPr>
-          <a:xfrm>
-            <a:off x="9326880" y="1737360"/>
-            <a:ext cx="1554480" cy="1554480"/>
-          </a:xfrm>
-          <a:prstGeom prst="ellipse">
-            <a:avLst/>
-          </a:prstGeom>
-          <a:solidFill>
-            <a:srgbClr val="E4F4F2"/>
-          </a:solidFill>
-          <a:ln/>
-        </p:spPr>
-        <p:txBody>
-          <a:bodyPr/>
-          <a:p/>
-        </p:txBody>
-      </p:sp>
-      <p:pic>
-        <p:nvPicPr>
-          <p:cNvPr id="9" name="Image 0" descr="icons/exchange.png">    </p:cNvPr>
-          <p:cNvPicPr>
-            <a:picLocks noChangeAspect="1"/>
-          </p:cNvPicPr>
-          <p:nvPr/>
-        </p:nvPicPr>
-        <p:blipFill>
-          <a:blip r:embed="rId1"/>
-          <a:stretch>
-            <a:fillRect/>
-          </a:stretch>
-        </p:blipFill>
-        <p:spPr>
-          <a:xfrm>
-            <a:off x="9668866" y="2079346"/>
-            <a:ext cx="870509" cy="870509"/>
-          </a:xfrm>
-          <a:prstGeom prst="rect">
-            <a:avLst/>
-          </a:prstGeom>
-        </p:spPr>
-      </p:pic>
-      <p:sp>
-        <p:nvSpPr>
-          <p:cNvPr id="10" name="Text 7"/>
-          <p:cNvSpPr/>
-          <p:nvPr/>
-        </p:nvSpPr>
-        <p:spPr>
-          <a:xfrm>
-            <a:off x="8869680" y="3429000"/>
-            <a:ext cx="2560320" cy="457200"/>
-          </a:xfrm>
-          <a:prstGeom prst="rect">
-            <a:avLst/>
-          </a:prstGeom>
-          <a:noFill/>
-          <a:ln/>
-        </p:spPr>
-        <p:txBody>
-          <a:bodyPr wrap="square" rtlCol="0" anchor="ctr"/>
-          <a:lstStyle/>
-          <a:p>
-            <a:pPr algn="ctr" indent="0" marL="0">
-              <a:buNone/>
-            </a:pPr>
-            <a:r>
-              <a:rPr lang="en-US" sz="1500" dirty="0">
-                <a:solidFill>
-                  <a:srgbClr val="5C6E77"/>
-                </a:solidFill>
-                <a:latin typeface="Meiryo" pitchFamily="34" charset="0"/>
-                <a:ea typeface="Meiryo" pitchFamily="34" charset="-122"/>
-                <a:cs typeface="Meiryo" pitchFamily="34" charset="-120"/>
-              </a:rPr>
-              <a:t>だから――</a:t>
-            </a:r>
-            <a:endParaRPr lang="en-US" sz="1500" dirty="0"/>
-          </a:p>
-        </p:txBody>
-      </p:sp>
-      <p:sp>
-        <p:nvSpPr>
-          <p:cNvPr id="11" name="Shape 8"/>
-          <p:cNvSpPr/>
-          <p:nvPr/>
-        </p:nvSpPr>
-        <p:spPr>
-          <a:xfrm>
-            <a:off x="822960" y="5120640"/>
-            <a:ext cx="10607040" cy="1097280"/>
-          </a:xfrm>
-          <a:prstGeom prst="roundRect">
-            <a:avLst>
-              <a:gd name="adj" fmla="val 12500"/>
-            </a:avLst>
-          </a:prstGeom>
-          <a:solidFill>
-            <a:srgbClr val="FEF3DC"/>
-          </a:solidFill>
-          <a:ln w="19050">
-            <a:solidFill>
-              <a:srgbClr val="F9A826"/>
-            </a:solidFill>
-            <a:prstDash val="solid"/>
-          </a:ln>
-        </p:spPr>
-        <p:txBody>
-          <a:bodyPr/>
-          <a:p/>
-        </p:txBody>
-      </p:sp>
-      <p:sp>
-        <p:nvSpPr>
-          <p:cNvPr id="12" name="Text 9"/>
-          <p:cNvSpPr/>
-          <p:nvPr/>
-        </p:nvSpPr>
-        <p:spPr>
-          <a:xfrm>
-            <a:off x="1005840" y="5120640"/>
-            <a:ext cx="10241280" cy="1097280"/>
-          </a:xfrm>
-          <a:prstGeom prst="rect">
-            <a:avLst/>
-          </a:prstGeom>
-          <a:noFill/>
-          <a:ln/>
-        </p:spPr>
-        <p:txBody>
-          <a:bodyPr wrap="square" rtlCol="0" anchor="ctr"/>
-          <a:lstStyle/>
-          <a:p>
-            <a:pPr algn="ctr" indent="0" marL="0">
-              <a:buNone/>
-            </a:pPr>
-            <a:r>
-              <a:rPr lang="en-US" sz="1900" b="1" dirty="0">
-                <a:solidFill>
-                  <a:srgbClr val="2B3A42"/>
-                </a:solidFill>
-                <a:latin typeface="Meiryo" pitchFamily="34" charset="0"/>
-                <a:ea typeface="Meiryo" pitchFamily="34" charset="-122"/>
-                <a:cs typeface="Meiryo" pitchFamily="34" charset="-120"/>
-              </a:rPr>
-              <a:t>さんせいを きいたら、はんたいも きく。ぴったり同じ答えほど、一回 とまる。</a:t>
-            </a:r>
-            <a:endParaRPr lang="en-US" sz="1900" dirty="0"/>
-          </a:p>
-        </p:txBody>
-      </p:sp>
-      <p:sp>
-        <p:nvSpPr>
-          <p:cNvPr id="13" name="Text 10"/>
-          <p:cNvSpPr/>
-          <p:nvPr/>
-        </p:nvSpPr>
-        <p:spPr>
-          <a:xfrm>
-            <a:off x="11521440" y="6400800"/>
-            <a:ext cx="457200" cy="320040"/>
-          </a:xfrm>
-          <a:prstGeom prst="rect">
-            <a:avLst/>
-          </a:prstGeom>
-          <a:noFill/>
-          <a:ln/>
-        </p:spPr>
-        <p:txBody>
-          <a:bodyPr wrap="square" lIns="0" tIns="0" rIns="0" bIns="0" rtlCol="0" anchor="ctr"/>
-          <a:lstStyle/>
-          <a:p>
-            <a:pPr algn="r" indent="0" marL="0">
-              <a:buNone/>
-            </a:pPr>
-            <a:r>
-              <a:rPr lang="en-US" sz="1100" dirty="0">
-                <a:solidFill>
-                  <a:srgbClr val="9AA7AD"/>
-                </a:solidFill>
-                <a:latin typeface="Meiryo" pitchFamily="34" charset="0"/>
-                <a:ea typeface="Meiryo" pitchFamily="34" charset="-122"/>
-                <a:cs typeface="Meiryo" pitchFamily="34" charset="-120"/>
-              </a:rPr>
-              <a:t>10</a:t>
-            </a:r>
-            <a:endParaRPr lang="en-US" sz="1100" dirty="0"/>
           </a:p>
         </p:txBody>
       </p:sp>
